--- a/mutsu_water_rate/20_市長説明ライン/13_レビュー反映_2パターン_20261023/B_是正基準/04_図表編_B_是正基準.pptx
+++ b/mutsu_water_rate/20_市長説明ライン/13_レビュー反映_2パターン_20261023/B_是正基準/04_図表編_B_是正基準.pptx
@@ -8,6 +8,7 @@
     <p:sldId id="256" r:id="rId7"/>
     <p:sldId id="257" r:id="rId8"/>
     <p:sldId id="258" r:id="rId9"/>
+    <p:sldId id="259" r:id="rId10"/>
   </p:sldIdLst>
   <p:sldSz cx="12192000" cy="6858000" type="screen4x3"/>
   <p:notesSz cx="6858000" cy="9144000"/>
@@ -4615,6 +4616,2080 @@
                 <a:cs typeface="BIZ UDPゴシック"/>
               </a:rPr>
               <a:t>単位：百万円。R11以降に改定率を適用した試算（営業収益の二重計上を是正した基準）。当期純利益の黒字と、企業債償還・施設更新に必要な資金の確保は別の論点。</a:t>
+            </a:r>
+          </a:p>
+        </p:txBody>
+      </p:sp>
+    </p:spTree>
+  </p:cSld>
+  <p:clrMapOvr>
+    <a:masterClrMapping/>
+  </p:clrMapOvr>
+</p:sld>
+</file>
+
+<file path=ppt/slides/slide4.xml><?xml version="1.0" encoding="utf-8"?>
+<p:sld xmlns:a="http://schemas.openxmlformats.org/drawingml/2006/main" xmlns:p="http://schemas.openxmlformats.org/presentationml/2006/main" xmlns:r="http://schemas.openxmlformats.org/officeDocument/2006/relationships">
+  <p:cSld>
+    <p:spTree>
+      <p:nvGrpSpPr>
+        <p:cNvPr id="1" name=""/>
+        <p:cNvGrpSpPr/>
+        <p:nvPr/>
+      </p:nvGrpSpPr>
+      <p:grpSpPr/>
+      <p:sp>
+        <p:nvSpPr>
+          <p:cNvPr id="2" name="TextBox 1"/>
+          <p:cNvSpPr txBox="1"/>
+          <p:nvPr/>
+        </p:nvSpPr>
+        <p:spPr>
+          <a:xfrm>
+            <a:off x="410399" y="230400"/>
+            <a:ext cx="11052000" cy="410399"/>
+          </a:xfrm>
+          <a:prstGeom prst="rect">
+            <a:avLst/>
+          </a:prstGeom>
+          <a:noFill/>
+        </p:spPr>
+        <p:txBody>
+          <a:bodyPr wrap="square">
+            <a:spAutoFit/>
+          </a:bodyPr>
+          <a:lstStyle/>
+          <a:p>
+            <a:r>
+              <a:rPr sz="2200" b="1">
+                <a:solidFill>
+                  <a:srgbClr val="1C3C60"/>
+                </a:solidFill>
+                <a:latin typeface="BIZ UDPゴシック"/>
+                <a:ea typeface="BIZ UDPゴシック"/>
+                <a:cs typeface="BIZ UDPゴシック"/>
+              </a:rPr>
+              <a:t>料金改定による使用者負担の影響</a:t>
+            </a:r>
+          </a:p>
+        </p:txBody>
+      </p:sp>
+      <p:sp>
+        <p:nvSpPr>
+          <p:cNvPr id="3" name="TextBox 2"/>
+          <p:cNvSpPr txBox="1"/>
+          <p:nvPr/>
+        </p:nvSpPr>
+        <p:spPr>
+          <a:xfrm>
+            <a:off x="439200" y="712800"/>
+            <a:ext cx="10980000" cy="230400"/>
+          </a:xfrm>
+          <a:prstGeom prst="rect">
+            <a:avLst/>
+          </a:prstGeom>
+          <a:noFill/>
+        </p:spPr>
+        <p:txBody>
+          <a:bodyPr wrap="square">
+            <a:spAutoFit/>
+          </a:bodyPr>
+          <a:lstStyle/>
+          <a:p>
+            <a:r>
+              <a:rPr sz="1200" b="0">
+                <a:solidFill>
+                  <a:srgbClr val="191C23"/>
+                </a:solidFill>
+                <a:latin typeface="BIZ UDPゴシック"/>
+                <a:ea typeface="BIZ UDPゴシック"/>
+                <a:cs typeface="BIZ UDPゴシック"/>
+              </a:rPr>
+              <a:t>一般家庭（月20㎥）では10％改定で月462円、30％改定で月1,397円の増加</a:t>
+            </a:r>
+          </a:p>
+        </p:txBody>
+      </p:sp>
+      <p:sp>
+        <p:nvSpPr>
+          <p:cNvPr id="4" name="TextBox 3"/>
+          <p:cNvSpPr txBox="1"/>
+          <p:nvPr/>
+        </p:nvSpPr>
+        <p:spPr>
+          <a:xfrm>
+            <a:off x="11520000" y="6490800"/>
+            <a:ext cx="503999" cy="165600"/>
+          </a:xfrm>
+          <a:prstGeom prst="rect">
+            <a:avLst/>
+          </a:prstGeom>
+          <a:noFill/>
+        </p:spPr>
+        <p:txBody>
+          <a:bodyPr wrap="square">
+            <a:spAutoFit/>
+          </a:bodyPr>
+          <a:lstStyle/>
+          <a:p>
+            <a:r>
+              <a:rPr sz="1000" b="0">
+                <a:solidFill>
+                  <a:srgbClr val="191C23"/>
+                </a:solidFill>
+                <a:latin typeface="BIZ UDPゴシック"/>
+                <a:ea typeface="BIZ UDPゴシック"/>
+                <a:cs typeface="BIZ UDPゴシック"/>
+              </a:rPr>
+              <a:t>4</a:t>
+            </a:r>
+          </a:p>
+        </p:txBody>
+      </p:sp>
+      <p:graphicFrame>
+        <p:nvGraphicFramePr>
+          <p:cNvPr id="5" name="Table 4"/>
+          <p:cNvGraphicFramePr>
+            <a:graphicFrameLocks noGrp="1"/>
+          </p:cNvGraphicFramePr>
+          <p:nvPr/>
+        </p:nvGraphicFramePr>
+        <p:xfrm>
+          <a:off x="576000" y="1188000"/>
+          <a:ext cx="11016000" cy="3240000"/>
+        </p:xfrm>
+        <a:graphic>
+          <a:graphicData uri="http://schemas.openxmlformats.org/drawingml/2006/table">
+            <a:tbl>
+              <a:tblPr firstRow="1" bandRow="1">
+                <a:tableStyleId>{5C22544A-7EE6-4342-B048-85BDC9FD1C3A}</a:tableStyleId>
+              </a:tblPr>
+              <a:tblGrid>
+                <a:gridCol w="1512000"/>
+                <a:gridCol w="1296000"/>
+                <a:gridCol w="1296000"/>
+                <a:gridCol w="1296000"/>
+                <a:gridCol w="1296000"/>
+                <a:gridCol w="1440000"/>
+                <a:gridCol w="1440000"/>
+                <a:gridCol w="1440000"/>
+              </a:tblGrid>
+              <a:tr h="360000">
+                <a:tc>
+                  <a:txBody>
+                    <a:bodyPr/>
+                    <a:lstStyle/>
+                    <a:p>
+                      <a:pPr algn="ctr"/>
+                      <a:r>
+                        <a:rPr sz="900" b="1">
+                          <a:solidFill>
+                            <a:srgbClr val="FFFFFF"/>
+                          </a:solidFill>
+                          <a:latin typeface="BIZ UDPゴシック"/>
+                          <a:ea typeface="BIZ UDPゴシック"/>
+                          <a:cs typeface="BIZ UDPゴシック"/>
+                        </a:rPr>
+                        <a:t>口径</a:t>
+                      </a:r>
+                    </a:p>
+                  </a:txBody>
+                  <a:tcPr>
+                    <a:solidFill>
+                      <a:srgbClr val="1C3C60"/>
+                    </a:solidFill>
+                  </a:tcPr>
+                </a:tc>
+                <a:tc>
+                  <a:txBody>
+                    <a:bodyPr/>
+                    <a:lstStyle/>
+                    <a:p>
+                      <a:pPr algn="ctr"/>
+                      <a:r>
+                        <a:rPr sz="900" b="1">
+                          <a:solidFill>
+                            <a:srgbClr val="FFFFFF"/>
+                          </a:solidFill>
+                          <a:latin typeface="BIZ UDPゴシック"/>
+                          <a:ea typeface="BIZ UDPゴシック"/>
+                          <a:cs typeface="BIZ UDPゴシック"/>
+                        </a:rPr>
+                        <a:t>区分</a:t>
+                      </a:r>
+                    </a:p>
+                  </a:txBody>
+                  <a:tcPr>
+                    <a:solidFill>
+                      <a:srgbClr val="1C3C60"/>
+                    </a:solidFill>
+                  </a:tcPr>
+                </a:tc>
+                <a:tc>
+                  <a:txBody>
+                    <a:bodyPr/>
+                    <a:lstStyle/>
+                    <a:p>
+                      <a:pPr algn="ctr"/>
+                      <a:r>
+                        <a:rPr sz="900" b="1">
+                          <a:solidFill>
+                            <a:srgbClr val="FFFFFF"/>
+                          </a:solidFill>
+                          <a:latin typeface="BIZ UDPゴシック"/>
+                          <a:ea typeface="BIZ UDPゴシック"/>
+                          <a:cs typeface="BIZ UDPゴシック"/>
+                        </a:rPr>
+                        <a:t>基本料金</a:t>
+                      </a:r>
+                    </a:p>
+                  </a:txBody>
+                  <a:tcPr>
+                    <a:solidFill>
+                      <a:srgbClr val="1C3C60"/>
+                    </a:solidFill>
+                  </a:tcPr>
+                </a:tc>
+                <a:tc>
+                  <a:txBody>
+                    <a:bodyPr/>
+                    <a:lstStyle/>
+                    <a:p>
+                      <a:pPr algn="ctr"/>
+                      <a:r>
+                        <a:rPr sz="900" b="1">
+                          <a:solidFill>
+                            <a:srgbClr val="FFFFFF"/>
+                          </a:solidFill>
+                          <a:latin typeface="BIZ UDPゴシック"/>
+                          <a:ea typeface="BIZ UDPゴシック"/>
+                          <a:cs typeface="BIZ UDPゴシック"/>
+                        </a:rPr>
+                        <a:t>従量単価/㎥</a:t>
+                      </a:r>
+                    </a:p>
+                  </a:txBody>
+                  <a:tcPr>
+                    <a:solidFill>
+                      <a:srgbClr val="1C3C60"/>
+                    </a:solidFill>
+                  </a:tcPr>
+                </a:tc>
+                <a:tc>
+                  <a:txBody>
+                    <a:bodyPr/>
+                    <a:lstStyle/>
+                    <a:p>
+                      <a:pPr algn="ctr"/>
+                      <a:r>
+                        <a:rPr sz="900" b="1">
+                          <a:solidFill>
+                            <a:srgbClr val="FFFFFF"/>
+                          </a:solidFill>
+                          <a:latin typeface="BIZ UDPゴシック"/>
+                          <a:ea typeface="BIZ UDPゴシック"/>
+                          <a:cs typeface="BIZ UDPゴシック"/>
+                        </a:rPr>
+                        <a:t>月10㎥</a:t>
+                      </a:r>
+                    </a:p>
+                  </a:txBody>
+                  <a:tcPr>
+                    <a:solidFill>
+                      <a:srgbClr val="1C3C60"/>
+                    </a:solidFill>
+                  </a:tcPr>
+                </a:tc>
+                <a:tc>
+                  <a:txBody>
+                    <a:bodyPr/>
+                    <a:lstStyle/>
+                    <a:p>
+                      <a:pPr algn="ctr"/>
+                      <a:r>
+                        <a:rPr sz="900" b="1">
+                          <a:solidFill>
+                            <a:srgbClr val="FFFFFF"/>
+                          </a:solidFill>
+                          <a:latin typeface="BIZ UDPゴシック"/>
+                          <a:ea typeface="BIZ UDPゴシック"/>
+                          <a:cs typeface="BIZ UDPゴシック"/>
+                        </a:rPr>
+                        <a:t>月20㎥</a:t>
+                      </a:r>
+                    </a:p>
+                  </a:txBody>
+                  <a:tcPr>
+                    <a:solidFill>
+                      <a:srgbClr val="1C3C60"/>
+                    </a:solidFill>
+                  </a:tcPr>
+                </a:tc>
+                <a:tc>
+                  <a:txBody>
+                    <a:bodyPr/>
+                    <a:lstStyle/>
+                    <a:p>
+                      <a:pPr algn="ctr"/>
+                      <a:r>
+                        <a:rPr sz="900" b="1">
+                          <a:solidFill>
+                            <a:srgbClr val="FFFFFF"/>
+                          </a:solidFill>
+                          <a:latin typeface="BIZ UDPゴシック"/>
+                          <a:ea typeface="BIZ UDPゴシック"/>
+                          <a:cs typeface="BIZ UDPゴシック"/>
+                        </a:rPr>
+                        <a:t>月30㎥</a:t>
+                      </a:r>
+                    </a:p>
+                  </a:txBody>
+                  <a:tcPr>
+                    <a:solidFill>
+                      <a:srgbClr val="1C3C60"/>
+                    </a:solidFill>
+                  </a:tcPr>
+                </a:tc>
+                <a:tc>
+                  <a:txBody>
+                    <a:bodyPr/>
+                    <a:lstStyle/>
+                    <a:p>
+                      <a:pPr algn="ctr"/>
+                      <a:r>
+                        <a:rPr sz="900" b="1">
+                          <a:solidFill>
+                            <a:srgbClr val="FFFFFF"/>
+                          </a:solidFill>
+                          <a:latin typeface="BIZ UDPゴシック"/>
+                          <a:ea typeface="BIZ UDPゴシック"/>
+                          <a:cs typeface="BIZ UDPゴシック"/>
+                        </a:rPr>
+                        <a:t>月20㎥の増加額</a:t>
+                      </a:r>
+                    </a:p>
+                  </a:txBody>
+                  <a:tcPr>
+                    <a:solidFill>
+                      <a:srgbClr val="1C3C60"/>
+                    </a:solidFill>
+                  </a:tcPr>
+                </a:tc>
+              </a:tr>
+              <a:tr h="360000">
+                <a:tc>
+                  <a:txBody>
+                    <a:bodyPr/>
+                    <a:lstStyle/>
+                    <a:p>
+                      <a:pPr algn="l"/>
+                      <a:r>
+                        <a:rPr sz="900" b="1">
+                          <a:solidFill>
+                            <a:srgbClr val="191C23"/>
+                          </a:solidFill>
+                          <a:latin typeface="BIZ UDPゴシック"/>
+                          <a:ea typeface="BIZ UDPゴシック"/>
+                          <a:cs typeface="BIZ UDPゴシック"/>
+                        </a:rPr>
+                        <a:t>13mm・20mm</a:t>
+                      </a:r>
+                    </a:p>
+                  </a:txBody>
+                  <a:tcPr>
+                    <a:solidFill>
+                      <a:srgbClr val="E1EBF7"/>
+                    </a:solidFill>
+                  </a:tcPr>
+                </a:tc>
+                <a:tc>
+                  <a:txBody>
+                    <a:bodyPr/>
+                    <a:lstStyle/>
+                    <a:p>
+                      <a:pPr algn="l"/>
+                      <a:r>
+                        <a:rPr sz="900" b="1">
+                          <a:solidFill>
+                            <a:srgbClr val="191C23"/>
+                          </a:solidFill>
+                          <a:latin typeface="BIZ UDPゴシック"/>
+                          <a:ea typeface="BIZ UDPゴシック"/>
+                          <a:cs typeface="BIZ UDPゴシック"/>
+                        </a:rPr>
+                        <a:t>現行料金</a:t>
+                      </a:r>
+                    </a:p>
+                  </a:txBody>
+                  <a:tcPr>
+                    <a:solidFill>
+                      <a:srgbClr val="E1EBF7"/>
+                    </a:solidFill>
+                  </a:tcPr>
+                </a:tc>
+                <a:tc>
+                  <a:txBody>
+                    <a:bodyPr/>
+                    <a:lstStyle/>
+                    <a:p>
+                      <a:pPr algn="ctr"/>
+                      <a:r>
+                        <a:rPr sz="900" b="0">
+                          <a:solidFill>
+                            <a:srgbClr val="191C23"/>
+                          </a:solidFill>
+                          <a:latin typeface="BIZ UDPゴシック"/>
+                          <a:ea typeface="BIZ UDPゴシック"/>
+                          <a:cs typeface="BIZ UDPゴシック"/>
+                        </a:rPr>
+                        <a:t>1,826円</a:t>
+                      </a:r>
+                    </a:p>
+                  </a:txBody>
+                  <a:tcPr>
+                    <a:solidFill>
+                      <a:srgbClr val="FFFFFF"/>
+                    </a:solidFill>
+                  </a:tcPr>
+                </a:tc>
+                <a:tc>
+                  <a:txBody>
+                    <a:bodyPr/>
+                    <a:lstStyle/>
+                    <a:p>
+                      <a:pPr algn="ctr"/>
+                      <a:r>
+                        <a:rPr sz="900" b="0">
+                          <a:solidFill>
+                            <a:srgbClr val="191C23"/>
+                          </a:solidFill>
+                          <a:latin typeface="BIZ UDPゴシック"/>
+                          <a:ea typeface="BIZ UDPゴシック"/>
+                          <a:cs typeface="BIZ UDPゴシック"/>
+                        </a:rPr>
+                        <a:t>284円</a:t>
+                      </a:r>
+                    </a:p>
+                  </a:txBody>
+                  <a:tcPr>
+                    <a:solidFill>
+                      <a:srgbClr val="FFFFFF"/>
+                    </a:solidFill>
+                  </a:tcPr>
+                </a:tc>
+                <a:tc>
+                  <a:txBody>
+                    <a:bodyPr/>
+                    <a:lstStyle/>
+                    <a:p>
+                      <a:pPr algn="ctr"/>
+                      <a:r>
+                        <a:rPr sz="900" b="0">
+                          <a:solidFill>
+                            <a:srgbClr val="191C23"/>
+                          </a:solidFill>
+                          <a:latin typeface="BIZ UDPゴシック"/>
+                          <a:ea typeface="BIZ UDPゴシック"/>
+                          <a:cs typeface="BIZ UDPゴシック"/>
+                        </a:rPr>
+                        <a:t>1,826円</a:t>
+                      </a:r>
+                    </a:p>
+                  </a:txBody>
+                  <a:tcPr>
+                    <a:solidFill>
+                      <a:srgbClr val="FFFFFF"/>
+                    </a:solidFill>
+                  </a:tcPr>
+                </a:tc>
+                <a:tc>
+                  <a:txBody>
+                    <a:bodyPr/>
+                    <a:lstStyle/>
+                    <a:p>
+                      <a:pPr algn="ctr"/>
+                      <a:r>
+                        <a:rPr sz="900" b="0">
+                          <a:solidFill>
+                            <a:srgbClr val="191C23"/>
+                          </a:solidFill>
+                          <a:latin typeface="BIZ UDPゴシック"/>
+                          <a:ea typeface="BIZ UDPゴシック"/>
+                          <a:cs typeface="BIZ UDPゴシック"/>
+                        </a:rPr>
+                        <a:t>4,666円</a:t>
+                      </a:r>
+                    </a:p>
+                  </a:txBody>
+                  <a:tcPr>
+                    <a:solidFill>
+                      <a:srgbClr val="FFFFFF"/>
+                    </a:solidFill>
+                  </a:tcPr>
+                </a:tc>
+                <a:tc>
+                  <a:txBody>
+                    <a:bodyPr/>
+                    <a:lstStyle/>
+                    <a:p>
+                      <a:pPr algn="ctr"/>
+                      <a:r>
+                        <a:rPr sz="900" b="0">
+                          <a:solidFill>
+                            <a:srgbClr val="191C23"/>
+                          </a:solidFill>
+                          <a:latin typeface="BIZ UDPゴシック"/>
+                          <a:ea typeface="BIZ UDPゴシック"/>
+                          <a:cs typeface="BIZ UDPゴシック"/>
+                        </a:rPr>
+                        <a:t>7,506円</a:t>
+                      </a:r>
+                    </a:p>
+                  </a:txBody>
+                  <a:tcPr>
+                    <a:solidFill>
+                      <a:srgbClr val="FFFFFF"/>
+                    </a:solidFill>
+                  </a:tcPr>
+                </a:tc>
+                <a:tc>
+                  <a:txBody>
+                    <a:bodyPr/>
+                    <a:lstStyle/>
+                    <a:p>
+                      <a:pPr algn="ctr"/>
+                      <a:r>
+                        <a:rPr sz="900" b="0">
+                          <a:solidFill>
+                            <a:srgbClr val="191C23"/>
+                          </a:solidFill>
+                          <a:latin typeface="BIZ UDPゴシック"/>
+                          <a:ea typeface="BIZ UDPゴシック"/>
+                          <a:cs typeface="BIZ UDPゴシック"/>
+                        </a:rPr>
+                        <a:t>—</a:t>
+                      </a:r>
+                    </a:p>
+                  </a:txBody>
+                  <a:tcPr>
+                    <a:solidFill>
+                      <a:srgbClr val="FFFFFF"/>
+                    </a:solidFill>
+                  </a:tcPr>
+                </a:tc>
+              </a:tr>
+              <a:tr h="360000">
+                <a:tc>
+                  <a:txBody>
+                    <a:bodyPr/>
+                    <a:lstStyle/>
+                    <a:p>
+                      <a:pPr algn="l"/>
+                      <a:r>
+                        <a:rPr sz="900" b="1">
+                          <a:solidFill>
+                            <a:srgbClr val="191C23"/>
+                          </a:solidFill>
+                          <a:latin typeface="BIZ UDPゴシック"/>
+                          <a:ea typeface="BIZ UDPゴシック"/>
+                          <a:cs typeface="BIZ UDPゴシック"/>
+                        </a:rPr>
+                        <a:t/>
+                      </a:r>
+                    </a:p>
+                  </a:txBody>
+                  <a:tcPr>
+                    <a:solidFill>
+                      <a:srgbClr val="E1EBF7"/>
+                    </a:solidFill>
+                  </a:tcPr>
+                </a:tc>
+                <a:tc>
+                  <a:txBody>
+                    <a:bodyPr/>
+                    <a:lstStyle/>
+                    <a:p>
+                      <a:pPr algn="l"/>
+                      <a:r>
+                        <a:rPr sz="900" b="1">
+                          <a:solidFill>
+                            <a:srgbClr val="191C23"/>
+                          </a:solidFill>
+                          <a:latin typeface="BIZ UDPゴシック"/>
+                          <a:ea typeface="BIZ UDPゴシック"/>
+                          <a:cs typeface="BIZ UDPゴシック"/>
+                        </a:rPr>
+                        <a:t>10％改定</a:t>
+                      </a:r>
+                    </a:p>
+                  </a:txBody>
+                  <a:tcPr>
+                    <a:solidFill>
+                      <a:srgbClr val="E1EBF7"/>
+                    </a:solidFill>
+                  </a:tcPr>
+                </a:tc>
+                <a:tc>
+                  <a:txBody>
+                    <a:bodyPr/>
+                    <a:lstStyle/>
+                    <a:p>
+                      <a:pPr algn="ctr"/>
+                      <a:r>
+                        <a:rPr sz="900" b="0">
+                          <a:solidFill>
+                            <a:srgbClr val="191C23"/>
+                          </a:solidFill>
+                          <a:latin typeface="BIZ UDPゴシック"/>
+                          <a:ea typeface="BIZ UDPゴシック"/>
+                          <a:cs typeface="BIZ UDPゴシック"/>
+                        </a:rPr>
+                        <a:t>2,008円</a:t>
+                      </a:r>
+                    </a:p>
+                  </a:txBody>
+                  <a:tcPr>
+                    <a:solidFill>
+                      <a:srgbClr val="F4F7FB"/>
+                    </a:solidFill>
+                  </a:tcPr>
+                </a:tc>
+                <a:tc>
+                  <a:txBody>
+                    <a:bodyPr/>
+                    <a:lstStyle/>
+                    <a:p>
+                      <a:pPr algn="ctr"/>
+                      <a:r>
+                        <a:rPr sz="900" b="0">
+                          <a:solidFill>
+                            <a:srgbClr val="191C23"/>
+                          </a:solidFill>
+                          <a:latin typeface="BIZ UDPゴシック"/>
+                          <a:ea typeface="BIZ UDPゴシック"/>
+                          <a:cs typeface="BIZ UDPゴシック"/>
+                        </a:rPr>
+                        <a:t>312円</a:t>
+                      </a:r>
+                    </a:p>
+                  </a:txBody>
+                  <a:tcPr>
+                    <a:solidFill>
+                      <a:srgbClr val="F4F7FB"/>
+                    </a:solidFill>
+                  </a:tcPr>
+                </a:tc>
+                <a:tc>
+                  <a:txBody>
+                    <a:bodyPr/>
+                    <a:lstStyle/>
+                    <a:p>
+                      <a:pPr algn="ctr"/>
+                      <a:r>
+                        <a:rPr sz="900" b="0">
+                          <a:solidFill>
+                            <a:srgbClr val="191C23"/>
+                          </a:solidFill>
+                          <a:latin typeface="BIZ UDPゴシック"/>
+                          <a:ea typeface="BIZ UDPゴシック"/>
+                          <a:cs typeface="BIZ UDPゴシック"/>
+                        </a:rPr>
+                        <a:t>2,008円</a:t>
+                      </a:r>
+                    </a:p>
+                  </a:txBody>
+                  <a:tcPr>
+                    <a:solidFill>
+                      <a:srgbClr val="F4F7FB"/>
+                    </a:solidFill>
+                  </a:tcPr>
+                </a:tc>
+                <a:tc>
+                  <a:txBody>
+                    <a:bodyPr/>
+                    <a:lstStyle/>
+                    <a:p>
+                      <a:pPr algn="ctr"/>
+                      <a:r>
+                        <a:rPr sz="900" b="0">
+                          <a:solidFill>
+                            <a:srgbClr val="191C23"/>
+                          </a:solidFill>
+                          <a:latin typeface="BIZ UDPゴシック"/>
+                          <a:ea typeface="BIZ UDPゴシック"/>
+                          <a:cs typeface="BIZ UDPゴシック"/>
+                        </a:rPr>
+                        <a:t>5,128円</a:t>
+                      </a:r>
+                    </a:p>
+                  </a:txBody>
+                  <a:tcPr>
+                    <a:solidFill>
+                      <a:srgbClr val="F4F7FB"/>
+                    </a:solidFill>
+                  </a:tcPr>
+                </a:tc>
+                <a:tc>
+                  <a:txBody>
+                    <a:bodyPr/>
+                    <a:lstStyle/>
+                    <a:p>
+                      <a:pPr algn="ctr"/>
+                      <a:r>
+                        <a:rPr sz="900" b="0">
+                          <a:solidFill>
+                            <a:srgbClr val="191C23"/>
+                          </a:solidFill>
+                          <a:latin typeface="BIZ UDPゴシック"/>
+                          <a:ea typeface="BIZ UDPゴシック"/>
+                          <a:cs typeface="BIZ UDPゴシック"/>
+                        </a:rPr>
+                        <a:t>8,248円</a:t>
+                      </a:r>
+                    </a:p>
+                  </a:txBody>
+                  <a:tcPr>
+                    <a:solidFill>
+                      <a:srgbClr val="F4F7FB"/>
+                    </a:solidFill>
+                  </a:tcPr>
+                </a:tc>
+                <a:tc>
+                  <a:txBody>
+                    <a:bodyPr/>
+                    <a:lstStyle/>
+                    <a:p>
+                      <a:pPr algn="ctr"/>
+                      <a:r>
+                        <a:rPr sz="900" b="1">
+                          <a:solidFill>
+                            <a:srgbClr val="BE4141"/>
+                          </a:solidFill>
+                          <a:latin typeface="BIZ UDPゴシック"/>
+                          <a:ea typeface="BIZ UDPゴシック"/>
+                          <a:cs typeface="BIZ UDPゴシック"/>
+                        </a:rPr>
+                        <a:t>+462円</a:t>
+                      </a:r>
+                    </a:p>
+                  </a:txBody>
+                  <a:tcPr>
+                    <a:solidFill>
+                      <a:srgbClr val="F4F7FB"/>
+                    </a:solidFill>
+                  </a:tcPr>
+                </a:tc>
+              </a:tr>
+              <a:tr h="360000">
+                <a:tc>
+                  <a:txBody>
+                    <a:bodyPr/>
+                    <a:lstStyle/>
+                    <a:p>
+                      <a:pPr algn="l"/>
+                      <a:r>
+                        <a:rPr sz="900" b="1">
+                          <a:solidFill>
+                            <a:srgbClr val="191C23"/>
+                          </a:solidFill>
+                          <a:latin typeface="BIZ UDPゴシック"/>
+                          <a:ea typeface="BIZ UDPゴシック"/>
+                          <a:cs typeface="BIZ UDPゴシック"/>
+                        </a:rPr>
+                        <a:t/>
+                      </a:r>
+                    </a:p>
+                  </a:txBody>
+                  <a:tcPr>
+                    <a:solidFill>
+                      <a:srgbClr val="E1EBF7"/>
+                    </a:solidFill>
+                  </a:tcPr>
+                </a:tc>
+                <a:tc>
+                  <a:txBody>
+                    <a:bodyPr/>
+                    <a:lstStyle/>
+                    <a:p>
+                      <a:pPr algn="l"/>
+                      <a:r>
+                        <a:rPr sz="900" b="1">
+                          <a:solidFill>
+                            <a:srgbClr val="191C23"/>
+                          </a:solidFill>
+                          <a:latin typeface="BIZ UDPゴシック"/>
+                          <a:ea typeface="BIZ UDPゴシック"/>
+                          <a:cs typeface="BIZ UDPゴシック"/>
+                        </a:rPr>
+                        <a:t>20％改定</a:t>
+                      </a:r>
+                    </a:p>
+                  </a:txBody>
+                  <a:tcPr>
+                    <a:solidFill>
+                      <a:srgbClr val="E1EBF7"/>
+                    </a:solidFill>
+                  </a:tcPr>
+                </a:tc>
+                <a:tc>
+                  <a:txBody>
+                    <a:bodyPr/>
+                    <a:lstStyle/>
+                    <a:p>
+                      <a:pPr algn="ctr"/>
+                      <a:r>
+                        <a:rPr sz="900" b="0">
+                          <a:solidFill>
+                            <a:srgbClr val="191C23"/>
+                          </a:solidFill>
+                          <a:latin typeface="BIZ UDPゴシック"/>
+                          <a:ea typeface="BIZ UDPゴシック"/>
+                          <a:cs typeface="BIZ UDPゴシック"/>
+                        </a:rPr>
+                        <a:t>2,191円</a:t>
+                      </a:r>
+                    </a:p>
+                  </a:txBody>
+                  <a:tcPr>
+                    <a:solidFill>
+                      <a:srgbClr val="FFFFFF"/>
+                    </a:solidFill>
+                  </a:tcPr>
+                </a:tc>
+                <a:tc>
+                  <a:txBody>
+                    <a:bodyPr/>
+                    <a:lstStyle/>
+                    <a:p>
+                      <a:pPr algn="ctr"/>
+                      <a:r>
+                        <a:rPr sz="900" b="0">
+                          <a:solidFill>
+                            <a:srgbClr val="191C23"/>
+                          </a:solidFill>
+                          <a:latin typeface="BIZ UDPゴシック"/>
+                          <a:ea typeface="BIZ UDPゴシック"/>
+                          <a:cs typeface="BIZ UDPゴシック"/>
+                        </a:rPr>
+                        <a:t>340円</a:t>
+                      </a:r>
+                    </a:p>
+                  </a:txBody>
+                  <a:tcPr>
+                    <a:solidFill>
+                      <a:srgbClr val="FFFFFF"/>
+                    </a:solidFill>
+                  </a:tcPr>
+                </a:tc>
+                <a:tc>
+                  <a:txBody>
+                    <a:bodyPr/>
+                    <a:lstStyle/>
+                    <a:p>
+                      <a:pPr algn="ctr"/>
+                      <a:r>
+                        <a:rPr sz="900" b="0">
+                          <a:solidFill>
+                            <a:srgbClr val="191C23"/>
+                          </a:solidFill>
+                          <a:latin typeface="BIZ UDPゴシック"/>
+                          <a:ea typeface="BIZ UDPゴシック"/>
+                          <a:cs typeface="BIZ UDPゴシック"/>
+                        </a:rPr>
+                        <a:t>2,191円</a:t>
+                      </a:r>
+                    </a:p>
+                  </a:txBody>
+                  <a:tcPr>
+                    <a:solidFill>
+                      <a:srgbClr val="FFFFFF"/>
+                    </a:solidFill>
+                  </a:tcPr>
+                </a:tc>
+                <a:tc>
+                  <a:txBody>
+                    <a:bodyPr/>
+                    <a:lstStyle/>
+                    <a:p>
+                      <a:pPr algn="ctr"/>
+                      <a:r>
+                        <a:rPr sz="900" b="0">
+                          <a:solidFill>
+                            <a:srgbClr val="191C23"/>
+                          </a:solidFill>
+                          <a:latin typeface="BIZ UDPゴシック"/>
+                          <a:ea typeface="BIZ UDPゴシック"/>
+                          <a:cs typeface="BIZ UDPゴシック"/>
+                        </a:rPr>
+                        <a:t>5,591円</a:t>
+                      </a:r>
+                    </a:p>
+                  </a:txBody>
+                  <a:tcPr>
+                    <a:solidFill>
+                      <a:srgbClr val="FFFFFF"/>
+                    </a:solidFill>
+                  </a:tcPr>
+                </a:tc>
+                <a:tc>
+                  <a:txBody>
+                    <a:bodyPr/>
+                    <a:lstStyle/>
+                    <a:p>
+                      <a:pPr algn="ctr"/>
+                      <a:r>
+                        <a:rPr sz="900" b="0">
+                          <a:solidFill>
+                            <a:srgbClr val="191C23"/>
+                          </a:solidFill>
+                          <a:latin typeface="BIZ UDPゴシック"/>
+                          <a:ea typeface="BIZ UDPゴシック"/>
+                          <a:cs typeface="BIZ UDPゴシック"/>
+                        </a:rPr>
+                        <a:t>8,991円</a:t>
+                      </a:r>
+                    </a:p>
+                  </a:txBody>
+                  <a:tcPr>
+                    <a:solidFill>
+                      <a:srgbClr val="FFFFFF"/>
+                    </a:solidFill>
+                  </a:tcPr>
+                </a:tc>
+                <a:tc>
+                  <a:txBody>
+                    <a:bodyPr/>
+                    <a:lstStyle/>
+                    <a:p>
+                      <a:pPr algn="ctr"/>
+                      <a:r>
+                        <a:rPr sz="900" b="1">
+                          <a:solidFill>
+                            <a:srgbClr val="BE4141"/>
+                          </a:solidFill>
+                          <a:latin typeface="BIZ UDPゴシック"/>
+                          <a:ea typeface="BIZ UDPゴシック"/>
+                          <a:cs typeface="BIZ UDPゴシック"/>
+                        </a:rPr>
+                        <a:t>+925円</a:t>
+                      </a:r>
+                    </a:p>
+                  </a:txBody>
+                  <a:tcPr>
+                    <a:solidFill>
+                      <a:srgbClr val="FFFFFF"/>
+                    </a:solidFill>
+                  </a:tcPr>
+                </a:tc>
+              </a:tr>
+              <a:tr h="360000">
+                <a:tc>
+                  <a:txBody>
+                    <a:bodyPr/>
+                    <a:lstStyle/>
+                    <a:p>
+                      <a:pPr algn="l"/>
+                      <a:r>
+                        <a:rPr sz="900" b="1">
+                          <a:solidFill>
+                            <a:srgbClr val="191C23"/>
+                          </a:solidFill>
+                          <a:latin typeface="BIZ UDPゴシック"/>
+                          <a:ea typeface="BIZ UDPゴシック"/>
+                          <a:cs typeface="BIZ UDPゴシック"/>
+                        </a:rPr>
+                        <a:t/>
+                      </a:r>
+                    </a:p>
+                  </a:txBody>
+                  <a:tcPr>
+                    <a:solidFill>
+                      <a:srgbClr val="E1EBF7"/>
+                    </a:solidFill>
+                  </a:tcPr>
+                </a:tc>
+                <a:tc>
+                  <a:txBody>
+                    <a:bodyPr/>
+                    <a:lstStyle/>
+                    <a:p>
+                      <a:pPr algn="l"/>
+                      <a:r>
+                        <a:rPr sz="900" b="1">
+                          <a:solidFill>
+                            <a:srgbClr val="191C23"/>
+                          </a:solidFill>
+                          <a:latin typeface="BIZ UDPゴシック"/>
+                          <a:ea typeface="BIZ UDPゴシック"/>
+                          <a:cs typeface="BIZ UDPゴシック"/>
+                        </a:rPr>
+                        <a:t>30％改定</a:t>
+                      </a:r>
+                    </a:p>
+                  </a:txBody>
+                  <a:tcPr>
+                    <a:solidFill>
+                      <a:srgbClr val="E1EBF7"/>
+                    </a:solidFill>
+                  </a:tcPr>
+                </a:tc>
+                <a:tc>
+                  <a:txBody>
+                    <a:bodyPr/>
+                    <a:lstStyle/>
+                    <a:p>
+                      <a:pPr algn="ctr"/>
+                      <a:r>
+                        <a:rPr sz="900" b="0">
+                          <a:solidFill>
+                            <a:srgbClr val="191C23"/>
+                          </a:solidFill>
+                          <a:latin typeface="BIZ UDPゴシック"/>
+                          <a:ea typeface="BIZ UDPゴシック"/>
+                          <a:cs typeface="BIZ UDPゴシック"/>
+                        </a:rPr>
+                        <a:t>2,373円</a:t>
+                      </a:r>
+                    </a:p>
+                  </a:txBody>
+                  <a:tcPr>
+                    <a:solidFill>
+                      <a:srgbClr val="F4F7FB"/>
+                    </a:solidFill>
+                  </a:tcPr>
+                </a:tc>
+                <a:tc>
+                  <a:txBody>
+                    <a:bodyPr/>
+                    <a:lstStyle/>
+                    <a:p>
+                      <a:pPr algn="ctr"/>
+                      <a:r>
+                        <a:rPr sz="900" b="0">
+                          <a:solidFill>
+                            <a:srgbClr val="191C23"/>
+                          </a:solidFill>
+                          <a:latin typeface="BIZ UDPゴシック"/>
+                          <a:ea typeface="BIZ UDPゴシック"/>
+                          <a:cs typeface="BIZ UDPゴシック"/>
+                        </a:rPr>
+                        <a:t>369円</a:t>
+                      </a:r>
+                    </a:p>
+                  </a:txBody>
+                  <a:tcPr>
+                    <a:solidFill>
+                      <a:srgbClr val="F4F7FB"/>
+                    </a:solidFill>
+                  </a:tcPr>
+                </a:tc>
+                <a:tc>
+                  <a:txBody>
+                    <a:bodyPr/>
+                    <a:lstStyle/>
+                    <a:p>
+                      <a:pPr algn="ctr"/>
+                      <a:r>
+                        <a:rPr sz="900" b="0">
+                          <a:solidFill>
+                            <a:srgbClr val="191C23"/>
+                          </a:solidFill>
+                          <a:latin typeface="BIZ UDPゴシック"/>
+                          <a:ea typeface="BIZ UDPゴシック"/>
+                          <a:cs typeface="BIZ UDPゴシック"/>
+                        </a:rPr>
+                        <a:t>2,373円</a:t>
+                      </a:r>
+                    </a:p>
+                  </a:txBody>
+                  <a:tcPr>
+                    <a:solidFill>
+                      <a:srgbClr val="F4F7FB"/>
+                    </a:solidFill>
+                  </a:tcPr>
+                </a:tc>
+                <a:tc>
+                  <a:txBody>
+                    <a:bodyPr/>
+                    <a:lstStyle/>
+                    <a:p>
+                      <a:pPr algn="ctr"/>
+                      <a:r>
+                        <a:rPr sz="900" b="0">
+                          <a:solidFill>
+                            <a:srgbClr val="191C23"/>
+                          </a:solidFill>
+                          <a:latin typeface="BIZ UDPゴシック"/>
+                          <a:ea typeface="BIZ UDPゴシック"/>
+                          <a:cs typeface="BIZ UDPゴシック"/>
+                        </a:rPr>
+                        <a:t>6,063円</a:t>
+                      </a:r>
+                    </a:p>
+                  </a:txBody>
+                  <a:tcPr>
+                    <a:solidFill>
+                      <a:srgbClr val="F4F7FB"/>
+                    </a:solidFill>
+                  </a:tcPr>
+                </a:tc>
+                <a:tc>
+                  <a:txBody>
+                    <a:bodyPr/>
+                    <a:lstStyle/>
+                    <a:p>
+                      <a:pPr algn="ctr"/>
+                      <a:r>
+                        <a:rPr sz="900" b="0">
+                          <a:solidFill>
+                            <a:srgbClr val="191C23"/>
+                          </a:solidFill>
+                          <a:latin typeface="BIZ UDPゴシック"/>
+                          <a:ea typeface="BIZ UDPゴシック"/>
+                          <a:cs typeface="BIZ UDPゴシック"/>
+                        </a:rPr>
+                        <a:t>9,753円</a:t>
+                      </a:r>
+                    </a:p>
+                  </a:txBody>
+                  <a:tcPr>
+                    <a:solidFill>
+                      <a:srgbClr val="F4F7FB"/>
+                    </a:solidFill>
+                  </a:tcPr>
+                </a:tc>
+                <a:tc>
+                  <a:txBody>
+                    <a:bodyPr/>
+                    <a:lstStyle/>
+                    <a:p>
+                      <a:pPr algn="ctr"/>
+                      <a:r>
+                        <a:rPr sz="900" b="1">
+                          <a:solidFill>
+                            <a:srgbClr val="BE4141"/>
+                          </a:solidFill>
+                          <a:latin typeface="BIZ UDPゴシック"/>
+                          <a:ea typeface="BIZ UDPゴシック"/>
+                          <a:cs typeface="BIZ UDPゴシック"/>
+                        </a:rPr>
+                        <a:t>+1,397円</a:t>
+                      </a:r>
+                    </a:p>
+                  </a:txBody>
+                  <a:tcPr>
+                    <a:solidFill>
+                      <a:srgbClr val="F4F7FB"/>
+                    </a:solidFill>
+                  </a:tcPr>
+                </a:tc>
+              </a:tr>
+              <a:tr h="360000">
+                <a:tc>
+                  <a:txBody>
+                    <a:bodyPr/>
+                    <a:lstStyle/>
+                    <a:p>
+                      <a:pPr algn="l"/>
+                      <a:r>
+                        <a:rPr sz="900" b="1">
+                          <a:solidFill>
+                            <a:srgbClr val="191C23"/>
+                          </a:solidFill>
+                          <a:latin typeface="BIZ UDPゴシック"/>
+                          <a:ea typeface="BIZ UDPゴシック"/>
+                          <a:cs typeface="BIZ UDPゴシック"/>
+                        </a:rPr>
+                        <a:t>25mm</a:t>
+                      </a:r>
+                    </a:p>
+                  </a:txBody>
+                  <a:tcPr>
+                    <a:solidFill>
+                      <a:srgbClr val="E1EBF7"/>
+                    </a:solidFill>
+                  </a:tcPr>
+                </a:tc>
+                <a:tc>
+                  <a:txBody>
+                    <a:bodyPr/>
+                    <a:lstStyle/>
+                    <a:p>
+                      <a:pPr algn="l"/>
+                      <a:r>
+                        <a:rPr sz="900" b="1">
+                          <a:solidFill>
+                            <a:srgbClr val="191C23"/>
+                          </a:solidFill>
+                          <a:latin typeface="BIZ UDPゴシック"/>
+                          <a:ea typeface="BIZ UDPゴシック"/>
+                          <a:cs typeface="BIZ UDPゴシック"/>
+                        </a:rPr>
+                        <a:t>現行料金</a:t>
+                      </a:r>
+                    </a:p>
+                  </a:txBody>
+                  <a:tcPr>
+                    <a:solidFill>
+                      <a:srgbClr val="E1EBF7"/>
+                    </a:solidFill>
+                  </a:tcPr>
+                </a:tc>
+                <a:tc>
+                  <a:txBody>
+                    <a:bodyPr/>
+                    <a:lstStyle/>
+                    <a:p>
+                      <a:pPr algn="ctr"/>
+                      <a:r>
+                        <a:rPr sz="900" b="0">
+                          <a:solidFill>
+                            <a:srgbClr val="191C23"/>
+                          </a:solidFill>
+                          <a:latin typeface="BIZ UDPゴシック"/>
+                          <a:ea typeface="BIZ UDPゴシック"/>
+                          <a:cs typeface="BIZ UDPゴシック"/>
+                        </a:rPr>
+                        <a:t>3,289円</a:t>
+                      </a:r>
+                    </a:p>
+                  </a:txBody>
+                  <a:tcPr>
+                    <a:solidFill>
+                      <a:srgbClr val="FFFFFF"/>
+                    </a:solidFill>
+                  </a:tcPr>
+                </a:tc>
+                <a:tc>
+                  <a:txBody>
+                    <a:bodyPr/>
+                    <a:lstStyle/>
+                    <a:p>
+                      <a:pPr algn="ctr"/>
+                      <a:r>
+                        <a:rPr sz="900" b="0">
+                          <a:solidFill>
+                            <a:srgbClr val="191C23"/>
+                          </a:solidFill>
+                          <a:latin typeface="BIZ UDPゴシック"/>
+                          <a:ea typeface="BIZ UDPゴシック"/>
+                          <a:cs typeface="BIZ UDPゴシック"/>
+                        </a:rPr>
+                        <a:t>284円</a:t>
+                      </a:r>
+                    </a:p>
+                  </a:txBody>
+                  <a:tcPr>
+                    <a:solidFill>
+                      <a:srgbClr val="FFFFFF"/>
+                    </a:solidFill>
+                  </a:tcPr>
+                </a:tc>
+                <a:tc>
+                  <a:txBody>
+                    <a:bodyPr/>
+                    <a:lstStyle/>
+                    <a:p>
+                      <a:pPr algn="ctr"/>
+                      <a:r>
+                        <a:rPr sz="900" b="0">
+                          <a:solidFill>
+                            <a:srgbClr val="191C23"/>
+                          </a:solidFill>
+                          <a:latin typeface="BIZ UDPゴシック"/>
+                          <a:ea typeface="BIZ UDPゴシック"/>
+                          <a:cs typeface="BIZ UDPゴシック"/>
+                        </a:rPr>
+                        <a:t>3,289円</a:t>
+                      </a:r>
+                    </a:p>
+                  </a:txBody>
+                  <a:tcPr>
+                    <a:solidFill>
+                      <a:srgbClr val="FFFFFF"/>
+                    </a:solidFill>
+                  </a:tcPr>
+                </a:tc>
+                <a:tc>
+                  <a:txBody>
+                    <a:bodyPr/>
+                    <a:lstStyle/>
+                    <a:p>
+                      <a:pPr algn="ctr"/>
+                      <a:r>
+                        <a:rPr sz="900" b="0">
+                          <a:solidFill>
+                            <a:srgbClr val="191C23"/>
+                          </a:solidFill>
+                          <a:latin typeface="BIZ UDPゴシック"/>
+                          <a:ea typeface="BIZ UDPゴシック"/>
+                          <a:cs typeface="BIZ UDPゴシック"/>
+                        </a:rPr>
+                        <a:t>6,129円</a:t>
+                      </a:r>
+                    </a:p>
+                  </a:txBody>
+                  <a:tcPr>
+                    <a:solidFill>
+                      <a:srgbClr val="FFFFFF"/>
+                    </a:solidFill>
+                  </a:tcPr>
+                </a:tc>
+                <a:tc>
+                  <a:txBody>
+                    <a:bodyPr/>
+                    <a:lstStyle/>
+                    <a:p>
+                      <a:pPr algn="ctr"/>
+                      <a:r>
+                        <a:rPr sz="900" b="0">
+                          <a:solidFill>
+                            <a:srgbClr val="191C23"/>
+                          </a:solidFill>
+                          <a:latin typeface="BIZ UDPゴシック"/>
+                          <a:ea typeface="BIZ UDPゴシック"/>
+                          <a:cs typeface="BIZ UDPゴシック"/>
+                        </a:rPr>
+                        <a:t>8,969円</a:t>
+                      </a:r>
+                    </a:p>
+                  </a:txBody>
+                  <a:tcPr>
+                    <a:solidFill>
+                      <a:srgbClr val="FFFFFF"/>
+                    </a:solidFill>
+                  </a:tcPr>
+                </a:tc>
+                <a:tc>
+                  <a:txBody>
+                    <a:bodyPr/>
+                    <a:lstStyle/>
+                    <a:p>
+                      <a:pPr algn="ctr"/>
+                      <a:r>
+                        <a:rPr sz="900" b="0">
+                          <a:solidFill>
+                            <a:srgbClr val="191C23"/>
+                          </a:solidFill>
+                          <a:latin typeface="BIZ UDPゴシック"/>
+                          <a:ea typeface="BIZ UDPゴシック"/>
+                          <a:cs typeface="BIZ UDPゴシック"/>
+                        </a:rPr>
+                        <a:t>—</a:t>
+                      </a:r>
+                    </a:p>
+                  </a:txBody>
+                  <a:tcPr>
+                    <a:solidFill>
+                      <a:srgbClr val="FFFFFF"/>
+                    </a:solidFill>
+                  </a:tcPr>
+                </a:tc>
+              </a:tr>
+              <a:tr h="360000">
+                <a:tc>
+                  <a:txBody>
+                    <a:bodyPr/>
+                    <a:lstStyle/>
+                    <a:p>
+                      <a:pPr algn="l"/>
+                      <a:r>
+                        <a:rPr sz="900" b="1">
+                          <a:solidFill>
+                            <a:srgbClr val="191C23"/>
+                          </a:solidFill>
+                          <a:latin typeface="BIZ UDPゴシック"/>
+                          <a:ea typeface="BIZ UDPゴシック"/>
+                          <a:cs typeface="BIZ UDPゴシック"/>
+                        </a:rPr>
+                        <a:t/>
+                      </a:r>
+                    </a:p>
+                  </a:txBody>
+                  <a:tcPr>
+                    <a:solidFill>
+                      <a:srgbClr val="E1EBF7"/>
+                    </a:solidFill>
+                  </a:tcPr>
+                </a:tc>
+                <a:tc>
+                  <a:txBody>
+                    <a:bodyPr/>
+                    <a:lstStyle/>
+                    <a:p>
+                      <a:pPr algn="l"/>
+                      <a:r>
+                        <a:rPr sz="900" b="1">
+                          <a:solidFill>
+                            <a:srgbClr val="191C23"/>
+                          </a:solidFill>
+                          <a:latin typeface="BIZ UDPゴシック"/>
+                          <a:ea typeface="BIZ UDPゴシック"/>
+                          <a:cs typeface="BIZ UDPゴシック"/>
+                        </a:rPr>
+                        <a:t>10％改定</a:t>
+                      </a:r>
+                    </a:p>
+                  </a:txBody>
+                  <a:tcPr>
+                    <a:solidFill>
+                      <a:srgbClr val="E1EBF7"/>
+                    </a:solidFill>
+                  </a:tcPr>
+                </a:tc>
+                <a:tc>
+                  <a:txBody>
+                    <a:bodyPr/>
+                    <a:lstStyle/>
+                    <a:p>
+                      <a:pPr algn="ctr"/>
+                      <a:r>
+                        <a:rPr sz="900" b="0">
+                          <a:solidFill>
+                            <a:srgbClr val="191C23"/>
+                          </a:solidFill>
+                          <a:latin typeface="BIZ UDPゴシック"/>
+                          <a:ea typeface="BIZ UDPゴシック"/>
+                          <a:cs typeface="BIZ UDPゴシック"/>
+                        </a:rPr>
+                        <a:t>3,617円</a:t>
+                      </a:r>
+                    </a:p>
+                  </a:txBody>
+                  <a:tcPr>
+                    <a:solidFill>
+                      <a:srgbClr val="F4F7FB"/>
+                    </a:solidFill>
+                  </a:tcPr>
+                </a:tc>
+                <a:tc>
+                  <a:txBody>
+                    <a:bodyPr/>
+                    <a:lstStyle/>
+                    <a:p>
+                      <a:pPr algn="ctr"/>
+                      <a:r>
+                        <a:rPr sz="900" b="0">
+                          <a:solidFill>
+                            <a:srgbClr val="191C23"/>
+                          </a:solidFill>
+                          <a:latin typeface="BIZ UDPゴシック"/>
+                          <a:ea typeface="BIZ UDPゴシック"/>
+                          <a:cs typeface="BIZ UDPゴシック"/>
+                        </a:rPr>
+                        <a:t>312円</a:t>
+                      </a:r>
+                    </a:p>
+                  </a:txBody>
+                  <a:tcPr>
+                    <a:solidFill>
+                      <a:srgbClr val="F4F7FB"/>
+                    </a:solidFill>
+                  </a:tcPr>
+                </a:tc>
+                <a:tc>
+                  <a:txBody>
+                    <a:bodyPr/>
+                    <a:lstStyle/>
+                    <a:p>
+                      <a:pPr algn="ctr"/>
+                      <a:r>
+                        <a:rPr sz="900" b="0">
+                          <a:solidFill>
+                            <a:srgbClr val="191C23"/>
+                          </a:solidFill>
+                          <a:latin typeface="BIZ UDPゴシック"/>
+                          <a:ea typeface="BIZ UDPゴシック"/>
+                          <a:cs typeface="BIZ UDPゴシック"/>
+                        </a:rPr>
+                        <a:t>3,617円</a:t>
+                      </a:r>
+                    </a:p>
+                  </a:txBody>
+                  <a:tcPr>
+                    <a:solidFill>
+                      <a:srgbClr val="F4F7FB"/>
+                    </a:solidFill>
+                  </a:tcPr>
+                </a:tc>
+                <a:tc>
+                  <a:txBody>
+                    <a:bodyPr/>
+                    <a:lstStyle/>
+                    <a:p>
+                      <a:pPr algn="ctr"/>
+                      <a:r>
+                        <a:rPr sz="900" b="0">
+                          <a:solidFill>
+                            <a:srgbClr val="191C23"/>
+                          </a:solidFill>
+                          <a:latin typeface="BIZ UDPゴシック"/>
+                          <a:ea typeface="BIZ UDPゴシック"/>
+                          <a:cs typeface="BIZ UDPゴシック"/>
+                        </a:rPr>
+                        <a:t>6,737円</a:t>
+                      </a:r>
+                    </a:p>
+                  </a:txBody>
+                  <a:tcPr>
+                    <a:solidFill>
+                      <a:srgbClr val="F4F7FB"/>
+                    </a:solidFill>
+                  </a:tcPr>
+                </a:tc>
+                <a:tc>
+                  <a:txBody>
+                    <a:bodyPr/>
+                    <a:lstStyle/>
+                    <a:p>
+                      <a:pPr algn="ctr"/>
+                      <a:r>
+                        <a:rPr sz="900" b="0">
+                          <a:solidFill>
+                            <a:srgbClr val="191C23"/>
+                          </a:solidFill>
+                          <a:latin typeface="BIZ UDPゴシック"/>
+                          <a:ea typeface="BIZ UDPゴシック"/>
+                          <a:cs typeface="BIZ UDPゴシック"/>
+                        </a:rPr>
+                        <a:t>9,857円</a:t>
+                      </a:r>
+                    </a:p>
+                  </a:txBody>
+                  <a:tcPr>
+                    <a:solidFill>
+                      <a:srgbClr val="F4F7FB"/>
+                    </a:solidFill>
+                  </a:tcPr>
+                </a:tc>
+                <a:tc>
+                  <a:txBody>
+                    <a:bodyPr/>
+                    <a:lstStyle/>
+                    <a:p>
+                      <a:pPr algn="ctr"/>
+                      <a:r>
+                        <a:rPr sz="900" b="1">
+                          <a:solidFill>
+                            <a:srgbClr val="BE4141"/>
+                          </a:solidFill>
+                          <a:latin typeface="BIZ UDPゴシック"/>
+                          <a:ea typeface="BIZ UDPゴシック"/>
+                          <a:cs typeface="BIZ UDPゴシック"/>
+                        </a:rPr>
+                        <a:t>+608円</a:t>
+                      </a:r>
+                    </a:p>
+                  </a:txBody>
+                  <a:tcPr>
+                    <a:solidFill>
+                      <a:srgbClr val="F4F7FB"/>
+                    </a:solidFill>
+                  </a:tcPr>
+                </a:tc>
+              </a:tr>
+              <a:tr h="360000">
+                <a:tc>
+                  <a:txBody>
+                    <a:bodyPr/>
+                    <a:lstStyle/>
+                    <a:p>
+                      <a:pPr algn="l"/>
+                      <a:r>
+                        <a:rPr sz="900" b="1">
+                          <a:solidFill>
+                            <a:srgbClr val="191C23"/>
+                          </a:solidFill>
+                          <a:latin typeface="BIZ UDPゴシック"/>
+                          <a:ea typeface="BIZ UDPゴシック"/>
+                          <a:cs typeface="BIZ UDPゴシック"/>
+                        </a:rPr>
+                        <a:t/>
+                      </a:r>
+                    </a:p>
+                  </a:txBody>
+                  <a:tcPr>
+                    <a:solidFill>
+                      <a:srgbClr val="E1EBF7"/>
+                    </a:solidFill>
+                  </a:tcPr>
+                </a:tc>
+                <a:tc>
+                  <a:txBody>
+                    <a:bodyPr/>
+                    <a:lstStyle/>
+                    <a:p>
+                      <a:pPr algn="l"/>
+                      <a:r>
+                        <a:rPr sz="900" b="1">
+                          <a:solidFill>
+                            <a:srgbClr val="191C23"/>
+                          </a:solidFill>
+                          <a:latin typeface="BIZ UDPゴシック"/>
+                          <a:ea typeface="BIZ UDPゴシック"/>
+                          <a:cs typeface="BIZ UDPゴシック"/>
+                        </a:rPr>
+                        <a:t>20％改定</a:t>
+                      </a:r>
+                    </a:p>
+                  </a:txBody>
+                  <a:tcPr>
+                    <a:solidFill>
+                      <a:srgbClr val="E1EBF7"/>
+                    </a:solidFill>
+                  </a:tcPr>
+                </a:tc>
+                <a:tc>
+                  <a:txBody>
+                    <a:bodyPr/>
+                    <a:lstStyle/>
+                    <a:p>
+                      <a:pPr algn="ctr"/>
+                      <a:r>
+                        <a:rPr sz="900" b="0">
+                          <a:solidFill>
+                            <a:srgbClr val="191C23"/>
+                          </a:solidFill>
+                          <a:latin typeface="BIZ UDPゴシック"/>
+                          <a:ea typeface="BIZ UDPゴシック"/>
+                          <a:cs typeface="BIZ UDPゴシック"/>
+                        </a:rPr>
+                        <a:t>3,946円</a:t>
+                      </a:r>
+                    </a:p>
+                  </a:txBody>
+                  <a:tcPr>
+                    <a:solidFill>
+                      <a:srgbClr val="FFFFFF"/>
+                    </a:solidFill>
+                  </a:tcPr>
+                </a:tc>
+                <a:tc>
+                  <a:txBody>
+                    <a:bodyPr/>
+                    <a:lstStyle/>
+                    <a:p>
+                      <a:pPr algn="ctr"/>
+                      <a:r>
+                        <a:rPr sz="900" b="0">
+                          <a:solidFill>
+                            <a:srgbClr val="191C23"/>
+                          </a:solidFill>
+                          <a:latin typeface="BIZ UDPゴシック"/>
+                          <a:ea typeface="BIZ UDPゴシック"/>
+                          <a:cs typeface="BIZ UDPゴシック"/>
+                        </a:rPr>
+                        <a:t>340円</a:t>
+                      </a:r>
+                    </a:p>
+                  </a:txBody>
+                  <a:tcPr>
+                    <a:solidFill>
+                      <a:srgbClr val="FFFFFF"/>
+                    </a:solidFill>
+                  </a:tcPr>
+                </a:tc>
+                <a:tc>
+                  <a:txBody>
+                    <a:bodyPr/>
+                    <a:lstStyle/>
+                    <a:p>
+                      <a:pPr algn="ctr"/>
+                      <a:r>
+                        <a:rPr sz="900" b="0">
+                          <a:solidFill>
+                            <a:srgbClr val="191C23"/>
+                          </a:solidFill>
+                          <a:latin typeface="BIZ UDPゴシック"/>
+                          <a:ea typeface="BIZ UDPゴシック"/>
+                          <a:cs typeface="BIZ UDPゴシック"/>
+                        </a:rPr>
+                        <a:t>3,946円</a:t>
+                      </a:r>
+                    </a:p>
+                  </a:txBody>
+                  <a:tcPr>
+                    <a:solidFill>
+                      <a:srgbClr val="FFFFFF"/>
+                    </a:solidFill>
+                  </a:tcPr>
+                </a:tc>
+                <a:tc>
+                  <a:txBody>
+                    <a:bodyPr/>
+                    <a:lstStyle/>
+                    <a:p>
+                      <a:pPr algn="ctr"/>
+                      <a:r>
+                        <a:rPr sz="900" b="0">
+                          <a:solidFill>
+                            <a:srgbClr val="191C23"/>
+                          </a:solidFill>
+                          <a:latin typeface="BIZ UDPゴシック"/>
+                          <a:ea typeface="BIZ UDPゴシック"/>
+                          <a:cs typeface="BIZ UDPゴシック"/>
+                        </a:rPr>
+                        <a:t>7,346円</a:t>
+                      </a:r>
+                    </a:p>
+                  </a:txBody>
+                  <a:tcPr>
+                    <a:solidFill>
+                      <a:srgbClr val="FFFFFF"/>
+                    </a:solidFill>
+                  </a:tcPr>
+                </a:tc>
+                <a:tc>
+                  <a:txBody>
+                    <a:bodyPr/>
+                    <a:lstStyle/>
+                    <a:p>
+                      <a:pPr algn="ctr"/>
+                      <a:r>
+                        <a:rPr sz="900" b="0">
+                          <a:solidFill>
+                            <a:srgbClr val="191C23"/>
+                          </a:solidFill>
+                          <a:latin typeface="BIZ UDPゴシック"/>
+                          <a:ea typeface="BIZ UDPゴシック"/>
+                          <a:cs typeface="BIZ UDPゴシック"/>
+                        </a:rPr>
+                        <a:t>10,746円</a:t>
+                      </a:r>
+                    </a:p>
+                  </a:txBody>
+                  <a:tcPr>
+                    <a:solidFill>
+                      <a:srgbClr val="FFFFFF"/>
+                    </a:solidFill>
+                  </a:tcPr>
+                </a:tc>
+                <a:tc>
+                  <a:txBody>
+                    <a:bodyPr/>
+                    <a:lstStyle/>
+                    <a:p>
+                      <a:pPr algn="ctr"/>
+                      <a:r>
+                        <a:rPr sz="900" b="1">
+                          <a:solidFill>
+                            <a:srgbClr val="BE4141"/>
+                          </a:solidFill>
+                          <a:latin typeface="BIZ UDPゴシック"/>
+                          <a:ea typeface="BIZ UDPゴシック"/>
+                          <a:cs typeface="BIZ UDPゴシック"/>
+                        </a:rPr>
+                        <a:t>+1,217円</a:t>
+                      </a:r>
+                    </a:p>
+                  </a:txBody>
+                  <a:tcPr>
+                    <a:solidFill>
+                      <a:srgbClr val="FFFFFF"/>
+                    </a:solidFill>
+                  </a:tcPr>
+                </a:tc>
+              </a:tr>
+              <a:tr h="360000">
+                <a:tc>
+                  <a:txBody>
+                    <a:bodyPr/>
+                    <a:lstStyle/>
+                    <a:p>
+                      <a:pPr algn="l"/>
+                      <a:r>
+                        <a:rPr sz="900" b="1">
+                          <a:solidFill>
+                            <a:srgbClr val="191C23"/>
+                          </a:solidFill>
+                          <a:latin typeface="BIZ UDPゴシック"/>
+                          <a:ea typeface="BIZ UDPゴシック"/>
+                          <a:cs typeface="BIZ UDPゴシック"/>
+                        </a:rPr>
+                        <a:t/>
+                      </a:r>
+                    </a:p>
+                  </a:txBody>
+                  <a:tcPr>
+                    <a:solidFill>
+                      <a:srgbClr val="E1EBF7"/>
+                    </a:solidFill>
+                  </a:tcPr>
+                </a:tc>
+                <a:tc>
+                  <a:txBody>
+                    <a:bodyPr/>
+                    <a:lstStyle/>
+                    <a:p>
+                      <a:pPr algn="l"/>
+                      <a:r>
+                        <a:rPr sz="900" b="1">
+                          <a:solidFill>
+                            <a:srgbClr val="191C23"/>
+                          </a:solidFill>
+                          <a:latin typeface="BIZ UDPゴシック"/>
+                          <a:ea typeface="BIZ UDPゴシック"/>
+                          <a:cs typeface="BIZ UDPゴシック"/>
+                        </a:rPr>
+                        <a:t>30％改定</a:t>
+                      </a:r>
+                    </a:p>
+                  </a:txBody>
+                  <a:tcPr>
+                    <a:solidFill>
+                      <a:srgbClr val="E1EBF7"/>
+                    </a:solidFill>
+                  </a:tcPr>
+                </a:tc>
+                <a:tc>
+                  <a:txBody>
+                    <a:bodyPr/>
+                    <a:lstStyle/>
+                    <a:p>
+                      <a:pPr algn="ctr"/>
+                      <a:r>
+                        <a:rPr sz="900" b="0">
+                          <a:solidFill>
+                            <a:srgbClr val="191C23"/>
+                          </a:solidFill>
+                          <a:latin typeface="BIZ UDPゴシック"/>
+                          <a:ea typeface="BIZ UDPゴシック"/>
+                          <a:cs typeface="BIZ UDPゴシック"/>
+                        </a:rPr>
+                        <a:t>4,275円</a:t>
+                      </a:r>
+                    </a:p>
+                  </a:txBody>
+                  <a:tcPr>
+                    <a:solidFill>
+                      <a:srgbClr val="F4F7FB"/>
+                    </a:solidFill>
+                  </a:tcPr>
+                </a:tc>
+                <a:tc>
+                  <a:txBody>
+                    <a:bodyPr/>
+                    <a:lstStyle/>
+                    <a:p>
+                      <a:pPr algn="ctr"/>
+                      <a:r>
+                        <a:rPr sz="900" b="0">
+                          <a:solidFill>
+                            <a:srgbClr val="191C23"/>
+                          </a:solidFill>
+                          <a:latin typeface="BIZ UDPゴシック"/>
+                          <a:ea typeface="BIZ UDPゴシック"/>
+                          <a:cs typeface="BIZ UDPゴシック"/>
+                        </a:rPr>
+                        <a:t>369円</a:t>
+                      </a:r>
+                    </a:p>
+                  </a:txBody>
+                  <a:tcPr>
+                    <a:solidFill>
+                      <a:srgbClr val="F4F7FB"/>
+                    </a:solidFill>
+                  </a:tcPr>
+                </a:tc>
+                <a:tc>
+                  <a:txBody>
+                    <a:bodyPr/>
+                    <a:lstStyle/>
+                    <a:p>
+                      <a:pPr algn="ctr"/>
+                      <a:r>
+                        <a:rPr sz="900" b="0">
+                          <a:solidFill>
+                            <a:srgbClr val="191C23"/>
+                          </a:solidFill>
+                          <a:latin typeface="BIZ UDPゴシック"/>
+                          <a:ea typeface="BIZ UDPゴシック"/>
+                          <a:cs typeface="BIZ UDPゴシック"/>
+                        </a:rPr>
+                        <a:t>4,275円</a:t>
+                      </a:r>
+                    </a:p>
+                  </a:txBody>
+                  <a:tcPr>
+                    <a:solidFill>
+                      <a:srgbClr val="F4F7FB"/>
+                    </a:solidFill>
+                  </a:tcPr>
+                </a:tc>
+                <a:tc>
+                  <a:txBody>
+                    <a:bodyPr/>
+                    <a:lstStyle/>
+                    <a:p>
+                      <a:pPr algn="ctr"/>
+                      <a:r>
+                        <a:rPr sz="900" b="0">
+                          <a:solidFill>
+                            <a:srgbClr val="191C23"/>
+                          </a:solidFill>
+                          <a:latin typeface="BIZ UDPゴシック"/>
+                          <a:ea typeface="BIZ UDPゴシック"/>
+                          <a:cs typeface="BIZ UDPゴシック"/>
+                        </a:rPr>
+                        <a:t>7,965円</a:t>
+                      </a:r>
+                    </a:p>
+                  </a:txBody>
+                  <a:tcPr>
+                    <a:solidFill>
+                      <a:srgbClr val="F4F7FB"/>
+                    </a:solidFill>
+                  </a:tcPr>
+                </a:tc>
+                <a:tc>
+                  <a:txBody>
+                    <a:bodyPr/>
+                    <a:lstStyle/>
+                    <a:p>
+                      <a:pPr algn="ctr"/>
+                      <a:r>
+                        <a:rPr sz="900" b="0">
+                          <a:solidFill>
+                            <a:srgbClr val="191C23"/>
+                          </a:solidFill>
+                          <a:latin typeface="BIZ UDPゴシック"/>
+                          <a:ea typeface="BIZ UDPゴシック"/>
+                          <a:cs typeface="BIZ UDPゴシック"/>
+                        </a:rPr>
+                        <a:t>11,655円</a:t>
+                      </a:r>
+                    </a:p>
+                  </a:txBody>
+                  <a:tcPr>
+                    <a:solidFill>
+                      <a:srgbClr val="F4F7FB"/>
+                    </a:solidFill>
+                  </a:tcPr>
+                </a:tc>
+                <a:tc>
+                  <a:txBody>
+                    <a:bodyPr/>
+                    <a:lstStyle/>
+                    <a:p>
+                      <a:pPr algn="ctr"/>
+                      <a:r>
+                        <a:rPr sz="900" b="1">
+                          <a:solidFill>
+                            <a:srgbClr val="BE4141"/>
+                          </a:solidFill>
+                          <a:latin typeface="BIZ UDPゴシック"/>
+                          <a:ea typeface="BIZ UDPゴシック"/>
+                          <a:cs typeface="BIZ UDPゴシック"/>
+                        </a:rPr>
+                        <a:t>+1,836円</a:t>
+                      </a:r>
+                    </a:p>
+                  </a:txBody>
+                  <a:tcPr>
+                    <a:solidFill>
+                      <a:srgbClr val="F4F7FB"/>
+                    </a:solidFill>
+                  </a:tcPr>
+                </a:tc>
+              </a:tr>
+            </a:tbl>
+          </a:graphicData>
+        </a:graphic>
+      </p:graphicFrame>
+      <p:sp>
+        <p:nvSpPr>
+          <p:cNvPr id="6" name="TextBox 5"/>
+          <p:cNvSpPr txBox="1"/>
+          <p:nvPr/>
+        </p:nvSpPr>
+        <p:spPr>
+          <a:xfrm>
+            <a:off x="594000" y="4608000"/>
+            <a:ext cx="10980000" cy="792000"/>
+          </a:xfrm>
+          <a:prstGeom prst="rect">
+            <a:avLst/>
+          </a:prstGeom>
+          <a:noFill/>
+        </p:spPr>
+        <p:txBody>
+          <a:bodyPr wrap="square">
+            <a:spAutoFit/>
+          </a:bodyPr>
+          <a:lstStyle/>
+          <a:p>
+            <a:r>
+              <a:rPr sz="1100" b="0">
+                <a:solidFill>
+                  <a:srgbClr val="191C23"/>
+                </a:solidFill>
+                <a:latin typeface="BIZ UDPゴシック"/>
+                <a:ea typeface="BIZ UDPゴシック"/>
+                <a:cs typeface="BIZ UDPゴシック"/>
+              </a:rPr>
+              <a:t>・基本料金には基本水量10㎥が含まれ、従量料金は10㎥超過分に課される。</a:t>
+            </a:r>
+          </a:p>
+          <a:p>
+            <a:r>
+              <a:rPr sz="1100" b="0">
+                <a:solidFill>
+                  <a:srgbClr val="191C23"/>
+                </a:solidFill>
+                <a:latin typeface="BIZ UDPゴシック"/>
+                <a:ea typeface="BIZ UDPゴシック"/>
+                <a:cs typeface="BIZ UDPゴシック"/>
+              </a:rPr>
+              <a:t>・改定率は基本料金・従量料金に一律適用。月10㎥以下の世帯は基本料金の増加のみとなる。</a:t>
+            </a:r>
+          </a:p>
+          <a:p>
+            <a:r>
+              <a:rPr sz="1100" b="0">
+                <a:solidFill>
+                  <a:srgbClr val="191C23"/>
+                </a:solidFill>
+                <a:latin typeface="BIZ UDPゴシック"/>
+                <a:ea typeface="BIZ UDPゴシック"/>
+                <a:cs typeface="BIZ UDPゴシック"/>
+              </a:rPr>
+              <a:t>・参考：口径100mm・月1,000㎥の大口利用者では、10％改定で月35,315円、30％改定で月106,945円の増加。</a:t>
+            </a:r>
+          </a:p>
+        </p:txBody>
+      </p:sp>
+      <p:sp>
+        <p:nvSpPr>
+          <p:cNvPr id="7" name="TextBox 6"/>
+          <p:cNvSpPr txBox="1"/>
+          <p:nvPr/>
+        </p:nvSpPr>
+        <p:spPr>
+          <a:xfrm>
+            <a:off x="594000" y="5868000"/>
+            <a:ext cx="10980000" cy="540000"/>
+          </a:xfrm>
+          <a:prstGeom prst="rect">
+            <a:avLst/>
+          </a:prstGeom>
+          <a:noFill/>
+        </p:spPr>
+        <p:txBody>
+          <a:bodyPr wrap="square">
+            <a:spAutoFit/>
+          </a:bodyPr>
+          <a:lstStyle/>
+          <a:p>
+            <a:r>
+              <a:rPr sz="1000" b="0">
+                <a:solidFill>
+                  <a:srgbClr val="555555"/>
+                </a:solidFill>
+                <a:latin typeface="BIZ UDPゴシック"/>
+                <a:ea typeface="BIZ UDPゴシック"/>
+                <a:cs typeface="BIZ UDPゴシック"/>
+              </a:rPr>
+              <a:t>出典：むつ市上下水道局 水道料金表（令和8年7月使用分〜）。税込。下水道使用料は含まない。令和8年7〜9月使用分は物価高騰対策として口径13〜25mmの基本料金が1か月1,650円減額されているが、上表は減額前の料金表による。口径40mm以上は料金表に基本水量の記載がないため、大口の例は全量を従量計算した仮置き。</a:t>
             </a:r>
           </a:p>
         </p:txBody>
